--- a/poster/FYP Poster - WONG KAI LUN.pptx
+++ b/poster/FYP Poster - WONG KAI LUN.pptx
@@ -3831,7 +3831,8 @@
           </a:prstGeom>
           <a:solidFill>
             <a:schemeClr val="accent5">
-              <a:lumMod val="50000"/>
+              <a:lumMod val="60000"/>
+              <a:lumOff val="40000"/>
             </a:schemeClr>
           </a:solidFill>
           <a:ln>
@@ -3894,7 +3895,7 @@
         </p:blipFill>
         <p:spPr>
           <a:xfrm>
-            <a:off x="920257" y="6276634"/>
+            <a:off x="819246" y="6306213"/>
             <a:ext cx="457200" cy="457200"/>
           </a:xfrm>
           <a:prstGeom prst="rect">
@@ -4430,7 +4431,7 @@
         </p:blipFill>
         <p:spPr>
           <a:xfrm>
-            <a:off x="187917" y="6274022"/>
+            <a:off x="181023" y="6306459"/>
             <a:ext cx="457200" cy="457200"/>
           </a:xfrm>
           <a:prstGeom prst="rect">
@@ -4727,7 +4728,7 @@
         </p:nvSpPr>
         <p:spPr>
           <a:xfrm>
-            <a:off x="7049690" y="3966308"/>
+            <a:off x="7030938" y="3832162"/>
             <a:ext cx="1786161" cy="338554"/>
           </a:xfrm>
           <a:prstGeom prst="rect">
@@ -4837,7 +4838,7 @@
         </p:nvSpPr>
         <p:spPr>
           <a:xfrm>
-            <a:off x="6910794" y="5707084"/>
+            <a:off x="6627231" y="5765907"/>
             <a:ext cx="2344641" cy="338554"/>
           </a:xfrm>
           <a:prstGeom prst="rect">
@@ -4906,7 +4907,7 @@
         </p:blipFill>
         <p:spPr>
           <a:xfrm>
-            <a:off x="3009822" y="3457290"/>
+            <a:off x="2812760" y="3167761"/>
             <a:ext cx="3505471" cy="2208446"/>
           </a:xfrm>
           <a:prstGeom prst="rect">
@@ -4972,7 +4973,7 @@
         </p:nvSpPr>
         <p:spPr>
           <a:xfrm>
-            <a:off x="3916051" y="5687964"/>
+            <a:off x="3615004" y="5368530"/>
             <a:ext cx="1786161" cy="338554"/>
           </a:xfrm>
           <a:prstGeom prst="rect">
@@ -5114,7 +5115,7 @@
         </p:blipFill>
         <p:spPr>
           <a:xfrm>
-            <a:off x="6702151" y="3065339"/>
+            <a:off x="6683399" y="2931193"/>
             <a:ext cx="2481240" cy="900969"/>
           </a:xfrm>
           <a:prstGeom prst="rect">
@@ -5150,6 +5151,7 @@
           </a:bodyPr>
           <a:lstStyle/>
           <a:p>
+            <a:pPr algn="ctr"/>
             <a:r>
               <a:rPr lang="en-US" sz="1600" dirty="0">
                 <a:solidFill>
@@ -5161,6 +5163,7 @@
             </a:r>
           </a:p>
           <a:p>
+            <a:pPr algn="ctr"/>
             <a:r>
               <a:rPr lang="en-US" sz="1600" dirty="0">
                 <a:solidFill>
@@ -5172,6 +5175,7 @@
             </a:r>
           </a:p>
           <a:p>
+            <a:pPr algn="ctr"/>
             <a:r>
               <a:rPr lang="en-US" sz="1600" dirty="0">
                 <a:solidFill>
@@ -5179,7 +5183,25 @@
                 </a:solidFill>
                 <a:latin typeface="Segoe UI Variable Text Semibold" pitchFamily="2" charset="0"/>
               </a:rPr>
-              <a:t>BSSE2409079@peninsulamalaysia.edu.my</a:t>
+              <a:t>BSSE2409079@</a:t>
+            </a:r>
+            <a:r>
+              <a:rPr lang="en-US" sz="1600" b="1" dirty="0">
+                <a:solidFill>
+                  <a:schemeClr val="bg1"/>
+                </a:solidFill>
+                <a:latin typeface="Segoe UI Variable Text Semibold" pitchFamily="2" charset="0"/>
+              </a:rPr>
+              <a:t>peninsulamalaysia</a:t>
+            </a:r>
+            <a:r>
+              <a:rPr lang="en-US" sz="1600" dirty="0">
+                <a:solidFill>
+                  <a:schemeClr val="bg1"/>
+                </a:solidFill>
+                <a:latin typeface="Segoe UI Variable Text Semibold" pitchFamily="2" charset="0"/>
+              </a:rPr>
+              <a:t>.edu.my</a:t>
             </a:r>
           </a:p>
         </p:txBody>
@@ -5212,8 +5234,8 @@
         </p:blipFill>
         <p:spPr>
           <a:xfrm>
-            <a:off x="6970899" y="4456819"/>
-            <a:ext cx="2224430" cy="1250265"/>
+            <a:off x="6550808" y="4338489"/>
+            <a:ext cx="2528794" cy="1421336"/>
           </a:xfrm>
           <a:prstGeom prst="rect">
             <a:avLst/>
@@ -5284,7 +5306,7 @@
         </p:blipFill>
         <p:spPr>
           <a:xfrm>
-            <a:off x="1484325" y="6286342"/>
+            <a:off x="1347263" y="6306213"/>
             <a:ext cx="1927160" cy="457200"/>
           </a:xfrm>
           <a:prstGeom prst="rect">
@@ -5320,8 +5342,8 @@
         </p:blipFill>
         <p:spPr>
           <a:xfrm>
-            <a:off x="3537317" y="6257799"/>
-            <a:ext cx="915400" cy="560682"/>
+            <a:off x="3451530" y="6306213"/>
+            <a:ext cx="746450" cy="457200"/>
           </a:xfrm>
           <a:prstGeom prst="rect">
             <a:avLst/>
@@ -5350,14 +5372,13 @@
               </a:ext>
             </a:extLst>
           </a:blip>
-          <a:stretch>
-            <a:fillRect/>
-          </a:stretch>
+          <a:srcRect/>
+          <a:stretch/>
         </p:blipFill>
         <p:spPr>
           <a:xfrm>
-            <a:off x="169356" y="21640"/>
-            <a:ext cx="1167666" cy="1167666"/>
+            <a:off x="179869" y="94341"/>
+            <a:ext cx="920142" cy="1167666"/>
           </a:xfrm>
           <a:prstGeom prst="rect">
             <a:avLst/>
@@ -5394,6 +5415,42 @@
           <a:xfrm>
             <a:off x="10802331" y="4850244"/>
             <a:ext cx="1274851" cy="1274851"/>
+          </a:xfrm>
+          <a:prstGeom prst="rect">
+            <a:avLst/>
+          </a:prstGeom>
+        </p:spPr>
+      </p:pic>
+      <p:pic>
+        <p:nvPicPr>
+          <p:cNvPr id="6" name="Picture 5">
+            <a:extLst>
+              <a:ext uri="{FF2B5EF4-FFF2-40B4-BE49-F238E27FC236}">
+                <a16:creationId xmlns:a16="http://schemas.microsoft.com/office/drawing/2014/main" id="{1EEED04B-6160-CAF5-5096-5F0189BFA686}"/>
+              </a:ext>
+            </a:extLst>
+          </p:cNvPr>
+          <p:cNvPicPr>
+            <a:picLocks noChangeAspect="1"/>
+          </p:cNvPicPr>
+          <p:nvPr/>
+        </p:nvPicPr>
+        <p:blipFill>
+          <a:blip r:embed="rId17">
+            <a:extLst>
+              <a:ext uri="{28A0092B-C50C-407E-A947-70E740481C1C}">
+                <a14:useLocalDpi xmlns:a14="http://schemas.microsoft.com/office/drawing/2010/main" val="0"/>
+              </a:ext>
+            </a:extLst>
+          </a:blip>
+          <a:stretch>
+            <a:fillRect/>
+          </a:stretch>
+        </p:blipFill>
+        <p:spPr>
+          <a:xfrm>
+            <a:off x="6901148" y="6247646"/>
+            <a:ext cx="2435892" cy="527777"/>
           </a:xfrm>
           <a:prstGeom prst="rect">
             <a:avLst/>
